--- a/docs/slides/COIL_student_templates.pptx
+++ b/docs/slides/COIL_student_templates.pptx
@@ -1918,7 +1918,7 @@
                 <a:ea typeface="Calibri" pitchFamily="34" charset="-122"/>
                 <a:cs typeface="Calibri" pitchFamily="34" charset="-120"/>
               </a:rPr>
-              <a:t>Slide A: lightning update (week 5) · Slides 1–6: final presentation (week 9)</a:t>
+              <a:t>Slide A: lightning update (week 5) · Slides 1–6: final presentation (week 8)</a:t>
             </a:r>
             <a:endParaRPr lang="en-US" sz="1200" dirty="0"/>
           </a:p>
@@ -2475,7 +2475,7 @@
                 <a:ea typeface="Calibri" pitchFamily="34" charset="-122"/>
                 <a:cs typeface="Calibri" pitchFamily="34" charset="-120"/>
               </a:rPr>
-              <a:t>Final presentation (week 9)</a:t>
+              <a:t>Final presentation (week 8)</a:t>
             </a:r>
             <a:endParaRPr lang="en-US" sz="1300" dirty="0"/>
           </a:p>

--- a/docs/slides/COIL_student_templates.pptx
+++ b/docs/slides/COIL_student_templates.pptx
@@ -2562,7 +2562,7 @@
                 <a:ea typeface="Calibri" pitchFamily="34" charset="-122"/>
                 <a:cs typeface="Calibri" pitchFamily="34" charset="-120"/>
               </a:rPr>
-              <a:t>Submit the slides and the dashboard on the website before the session.</a:t>
+              <a:t>Your dashboard goes on slide 5 (screenshot and link). Submit the slides on the website before the session.</a:t>
             </a:r>
             <a:endParaRPr lang="en-US" sz="1200" dirty="0"/>
           </a:p>
@@ -4969,7 +4969,7 @@
                 <a:ea typeface="Calibri" pitchFamily="34" charset="-122"/>
                 <a:cs typeface="Calibri" pitchFamily="34" charset="-120"/>
               </a:rPr>
-              <a:t>Link to the dashboard (or "PDF submitted on the website").</a:t>
+              <a:t>Link to the dashboard, if it is online.</a:t>
             </a:r>
             <a:endParaRPr lang="en-US" sz="1050" dirty="0"/>
           </a:p>
